--- a/誰能使我與神的愛隔絕 (崇拜版).pptx
+++ b/誰能使我與神的愛隔絕 (崇拜版).pptx
@@ -158,7 +158,7 @@
           <a:lstStyle/>
           <a:p>
             <a:r>
-              <a:rPr lang="en-US" altLang="zh-TW" smtClean="0"/>
+              <a:rPr lang="en-US" altLang="zh-TW"/>
               <a:t>Click to edit Master title style</a:t>
             </a:r>
             <a:endParaRPr lang="zh-TW" altLang="en-US"/>
@@ -277,7 +277,7 @@
           </a:lstStyle>
           <a:p>
             <a:r>
-              <a:rPr lang="en-US" altLang="zh-TW" smtClean="0"/>
+              <a:rPr lang="en-US" altLang="zh-TW"/>
               <a:t>Click to edit Master subtitle style</a:t>
             </a:r>
             <a:endParaRPr lang="zh-TW" altLang="en-US"/>
@@ -301,7 +301,7 @@
           <a:p>
             <a:fld id="{A6A23CE9-6925-450D-83BB-532BB1B49E73}" type="datetimeFigureOut">
               <a:rPr lang="vi-VN" smtClean="0"/>
-              <a:t>16/09/2023</a:t>
+              <a:t>13/09/2025</a:t>
             </a:fld>
             <a:endParaRPr lang="vi-VN"/>
           </a:p>
@@ -395,7 +395,7 @@
           <a:lstStyle/>
           <a:p>
             <a:r>
-              <a:rPr lang="en-US" altLang="zh-TW" smtClean="0"/>
+              <a:rPr lang="en-US" altLang="zh-TW"/>
               <a:t>Click to edit Master title style</a:t>
             </a:r>
             <a:endParaRPr lang="zh-TW" altLang="en-US"/>
@@ -419,35 +419,35 @@
           <a:p>
             <a:pPr lvl="0"/>
             <a:r>
-              <a:rPr lang="en-US" altLang="zh-TW" smtClean="0"/>
+              <a:rPr lang="en-US" altLang="zh-TW"/>
               <a:t>Edit Master text styles</a:t>
             </a:r>
           </a:p>
           <a:p>
             <a:pPr lvl="1"/>
             <a:r>
-              <a:rPr lang="en-US" altLang="zh-TW" smtClean="0"/>
+              <a:rPr lang="en-US" altLang="zh-TW"/>
               <a:t>Second level</a:t>
             </a:r>
           </a:p>
           <a:p>
             <a:pPr lvl="2"/>
             <a:r>
-              <a:rPr lang="en-US" altLang="zh-TW" smtClean="0"/>
+              <a:rPr lang="en-US" altLang="zh-TW"/>
               <a:t>Third level</a:t>
             </a:r>
           </a:p>
           <a:p>
             <a:pPr lvl="3"/>
             <a:r>
-              <a:rPr lang="en-US" altLang="zh-TW" smtClean="0"/>
+              <a:rPr lang="en-US" altLang="zh-TW"/>
               <a:t>Fourth level</a:t>
             </a:r>
           </a:p>
           <a:p>
             <a:pPr lvl="4"/>
             <a:r>
-              <a:rPr lang="en-US" altLang="zh-TW" smtClean="0"/>
+              <a:rPr lang="en-US" altLang="zh-TW"/>
               <a:t>Fifth level</a:t>
             </a:r>
             <a:endParaRPr lang="zh-TW" altLang="en-US"/>
@@ -471,7 +471,7 @@
           <a:p>
             <a:fld id="{A6A23CE9-6925-450D-83BB-532BB1B49E73}" type="datetimeFigureOut">
               <a:rPr lang="vi-VN" smtClean="0"/>
-              <a:t>16/09/2023</a:t>
+              <a:t>13/09/2025</a:t>
             </a:fld>
             <a:endParaRPr lang="vi-VN"/>
           </a:p>
@@ -570,7 +570,7 @@
           <a:lstStyle/>
           <a:p>
             <a:r>
-              <a:rPr lang="en-US" altLang="zh-TW" smtClean="0"/>
+              <a:rPr lang="en-US" altLang="zh-TW"/>
               <a:t>Click to edit Master title style</a:t>
             </a:r>
             <a:endParaRPr lang="zh-TW" altLang="en-US"/>
@@ -599,35 +599,35 @@
           <a:p>
             <a:pPr lvl="0"/>
             <a:r>
-              <a:rPr lang="en-US" altLang="zh-TW" smtClean="0"/>
+              <a:rPr lang="en-US" altLang="zh-TW"/>
               <a:t>Edit Master text styles</a:t>
             </a:r>
           </a:p>
           <a:p>
             <a:pPr lvl="1"/>
             <a:r>
-              <a:rPr lang="en-US" altLang="zh-TW" smtClean="0"/>
+              <a:rPr lang="en-US" altLang="zh-TW"/>
               <a:t>Second level</a:t>
             </a:r>
           </a:p>
           <a:p>
             <a:pPr lvl="2"/>
             <a:r>
-              <a:rPr lang="en-US" altLang="zh-TW" smtClean="0"/>
+              <a:rPr lang="en-US" altLang="zh-TW"/>
               <a:t>Third level</a:t>
             </a:r>
           </a:p>
           <a:p>
             <a:pPr lvl="3"/>
             <a:r>
-              <a:rPr lang="en-US" altLang="zh-TW" smtClean="0"/>
+              <a:rPr lang="en-US" altLang="zh-TW"/>
               <a:t>Fourth level</a:t>
             </a:r>
           </a:p>
           <a:p>
             <a:pPr lvl="4"/>
             <a:r>
-              <a:rPr lang="en-US" altLang="zh-TW" smtClean="0"/>
+              <a:rPr lang="en-US" altLang="zh-TW"/>
               <a:t>Fifth level</a:t>
             </a:r>
             <a:endParaRPr lang="zh-TW" altLang="en-US"/>
@@ -651,7 +651,7 @@
           <a:p>
             <a:fld id="{A6A23CE9-6925-450D-83BB-532BB1B49E73}" type="datetimeFigureOut">
               <a:rPr lang="vi-VN" smtClean="0"/>
-              <a:t>16/09/2023</a:t>
+              <a:t>13/09/2025</a:t>
             </a:fld>
             <a:endParaRPr lang="vi-VN"/>
           </a:p>
@@ -745,7 +745,7 @@
           <a:lstStyle/>
           <a:p>
             <a:r>
-              <a:rPr lang="en-US" altLang="zh-TW" smtClean="0"/>
+              <a:rPr lang="en-US" altLang="zh-TW"/>
               <a:t>Click to edit Master title style</a:t>
             </a:r>
             <a:endParaRPr lang="zh-TW" altLang="en-US"/>
@@ -769,35 +769,35 @@
           <a:p>
             <a:pPr lvl="0"/>
             <a:r>
-              <a:rPr lang="en-US" altLang="zh-TW" smtClean="0"/>
+              <a:rPr lang="en-US" altLang="zh-TW"/>
               <a:t>Edit Master text styles</a:t>
             </a:r>
           </a:p>
           <a:p>
             <a:pPr lvl="1"/>
             <a:r>
-              <a:rPr lang="en-US" altLang="zh-TW" smtClean="0"/>
+              <a:rPr lang="en-US" altLang="zh-TW"/>
               <a:t>Second level</a:t>
             </a:r>
           </a:p>
           <a:p>
             <a:pPr lvl="2"/>
             <a:r>
-              <a:rPr lang="en-US" altLang="zh-TW" smtClean="0"/>
+              <a:rPr lang="en-US" altLang="zh-TW"/>
               <a:t>Third level</a:t>
             </a:r>
           </a:p>
           <a:p>
             <a:pPr lvl="3"/>
             <a:r>
-              <a:rPr lang="en-US" altLang="zh-TW" smtClean="0"/>
+              <a:rPr lang="en-US" altLang="zh-TW"/>
               <a:t>Fourth level</a:t>
             </a:r>
           </a:p>
           <a:p>
             <a:pPr lvl="4"/>
             <a:r>
-              <a:rPr lang="en-US" altLang="zh-TW" smtClean="0"/>
+              <a:rPr lang="en-US" altLang="zh-TW"/>
               <a:t>Fifth level</a:t>
             </a:r>
             <a:endParaRPr lang="zh-TW" altLang="en-US"/>
@@ -821,7 +821,7 @@
           <a:p>
             <a:fld id="{A6A23CE9-6925-450D-83BB-532BB1B49E73}" type="datetimeFigureOut">
               <a:rPr lang="vi-VN" smtClean="0"/>
-              <a:t>16/09/2023</a:t>
+              <a:t>13/09/2025</a:t>
             </a:fld>
             <a:endParaRPr lang="vi-VN"/>
           </a:p>
@@ -924,7 +924,7 @@
           </a:lstStyle>
           <a:p>
             <a:r>
-              <a:rPr lang="en-US" altLang="zh-TW" smtClean="0"/>
+              <a:rPr lang="en-US" altLang="zh-TW"/>
               <a:t>Click to edit Master title style</a:t>
             </a:r>
             <a:endParaRPr lang="zh-TW" altLang="en-US"/>
@@ -1044,7 +1044,7 @@
           <a:p>
             <a:pPr lvl="0"/>
             <a:r>
-              <a:rPr lang="en-US" altLang="zh-TW" smtClean="0"/>
+              <a:rPr lang="en-US" altLang="zh-TW"/>
               <a:t>Edit Master text styles</a:t>
             </a:r>
           </a:p>
@@ -1067,7 +1067,7 @@
           <a:p>
             <a:fld id="{A6A23CE9-6925-450D-83BB-532BB1B49E73}" type="datetimeFigureOut">
               <a:rPr lang="vi-VN" smtClean="0"/>
-              <a:t>16/09/2023</a:t>
+              <a:t>13/09/2025</a:t>
             </a:fld>
             <a:endParaRPr lang="vi-VN"/>
           </a:p>
@@ -1161,7 +1161,7 @@
           <a:lstStyle/>
           <a:p>
             <a:r>
-              <a:rPr lang="en-US" altLang="zh-TW" smtClean="0"/>
+              <a:rPr lang="en-US" altLang="zh-TW"/>
               <a:t>Click to edit Master title style</a:t>
             </a:r>
             <a:endParaRPr lang="zh-TW" altLang="en-US"/>
@@ -1218,35 +1218,35 @@
           <a:p>
             <a:pPr lvl="0"/>
             <a:r>
-              <a:rPr lang="en-US" altLang="zh-TW" smtClean="0"/>
+              <a:rPr lang="en-US" altLang="zh-TW"/>
               <a:t>Edit Master text styles</a:t>
             </a:r>
           </a:p>
           <a:p>
             <a:pPr lvl="1"/>
             <a:r>
-              <a:rPr lang="en-US" altLang="zh-TW" smtClean="0"/>
+              <a:rPr lang="en-US" altLang="zh-TW"/>
               <a:t>Second level</a:t>
             </a:r>
           </a:p>
           <a:p>
             <a:pPr lvl="2"/>
             <a:r>
-              <a:rPr lang="en-US" altLang="zh-TW" smtClean="0"/>
+              <a:rPr lang="en-US" altLang="zh-TW"/>
               <a:t>Third level</a:t>
             </a:r>
           </a:p>
           <a:p>
             <a:pPr lvl="3"/>
             <a:r>
-              <a:rPr lang="en-US" altLang="zh-TW" smtClean="0"/>
+              <a:rPr lang="en-US" altLang="zh-TW"/>
               <a:t>Fourth level</a:t>
             </a:r>
           </a:p>
           <a:p>
             <a:pPr lvl="4"/>
             <a:r>
-              <a:rPr lang="en-US" altLang="zh-TW" smtClean="0"/>
+              <a:rPr lang="en-US" altLang="zh-TW"/>
               <a:t>Fifth level</a:t>
             </a:r>
             <a:endParaRPr lang="zh-TW" altLang="en-US"/>
@@ -1303,35 +1303,35 @@
           <a:p>
             <a:pPr lvl="0"/>
             <a:r>
-              <a:rPr lang="en-US" altLang="zh-TW" smtClean="0"/>
+              <a:rPr lang="en-US" altLang="zh-TW"/>
               <a:t>Edit Master text styles</a:t>
             </a:r>
           </a:p>
           <a:p>
             <a:pPr lvl="1"/>
             <a:r>
-              <a:rPr lang="en-US" altLang="zh-TW" smtClean="0"/>
+              <a:rPr lang="en-US" altLang="zh-TW"/>
               <a:t>Second level</a:t>
             </a:r>
           </a:p>
           <a:p>
             <a:pPr lvl="2"/>
             <a:r>
-              <a:rPr lang="en-US" altLang="zh-TW" smtClean="0"/>
+              <a:rPr lang="en-US" altLang="zh-TW"/>
               <a:t>Third level</a:t>
             </a:r>
           </a:p>
           <a:p>
             <a:pPr lvl="3"/>
             <a:r>
-              <a:rPr lang="en-US" altLang="zh-TW" smtClean="0"/>
+              <a:rPr lang="en-US" altLang="zh-TW"/>
               <a:t>Fourth level</a:t>
             </a:r>
           </a:p>
           <a:p>
             <a:pPr lvl="4"/>
             <a:r>
-              <a:rPr lang="en-US" altLang="zh-TW" smtClean="0"/>
+              <a:rPr lang="en-US" altLang="zh-TW"/>
               <a:t>Fifth level</a:t>
             </a:r>
             <a:endParaRPr lang="zh-TW" altLang="en-US"/>
@@ -1355,7 +1355,7 @@
           <a:p>
             <a:fld id="{A6A23CE9-6925-450D-83BB-532BB1B49E73}" type="datetimeFigureOut">
               <a:rPr lang="vi-VN" smtClean="0"/>
-              <a:t>16/09/2023</a:t>
+              <a:t>13/09/2025</a:t>
             </a:fld>
             <a:endParaRPr lang="vi-VN"/>
           </a:p>
@@ -1453,7 +1453,7 @@
           </a:lstStyle>
           <a:p>
             <a:r>
-              <a:rPr lang="en-US" altLang="zh-TW" smtClean="0"/>
+              <a:rPr lang="en-US" altLang="zh-TW"/>
               <a:t>Click to edit Master title style</a:t>
             </a:r>
             <a:endParaRPr lang="zh-TW" altLang="en-US"/>
@@ -1519,7 +1519,7 @@
           <a:p>
             <a:pPr lvl="0"/>
             <a:r>
-              <a:rPr lang="en-US" altLang="zh-TW" smtClean="0"/>
+              <a:rPr lang="en-US" altLang="zh-TW"/>
               <a:t>Edit Master text styles</a:t>
             </a:r>
           </a:p>
@@ -1575,35 +1575,35 @@
           <a:p>
             <a:pPr lvl="0"/>
             <a:r>
-              <a:rPr lang="en-US" altLang="zh-TW" smtClean="0"/>
+              <a:rPr lang="en-US" altLang="zh-TW"/>
               <a:t>Edit Master text styles</a:t>
             </a:r>
           </a:p>
           <a:p>
             <a:pPr lvl="1"/>
             <a:r>
-              <a:rPr lang="en-US" altLang="zh-TW" smtClean="0"/>
+              <a:rPr lang="en-US" altLang="zh-TW"/>
               <a:t>Second level</a:t>
             </a:r>
           </a:p>
           <a:p>
             <a:pPr lvl="2"/>
             <a:r>
-              <a:rPr lang="en-US" altLang="zh-TW" smtClean="0"/>
+              <a:rPr lang="en-US" altLang="zh-TW"/>
               <a:t>Third level</a:t>
             </a:r>
           </a:p>
           <a:p>
             <a:pPr lvl="3"/>
             <a:r>
-              <a:rPr lang="en-US" altLang="zh-TW" smtClean="0"/>
+              <a:rPr lang="en-US" altLang="zh-TW"/>
               <a:t>Fourth level</a:t>
             </a:r>
           </a:p>
           <a:p>
             <a:pPr lvl="4"/>
             <a:r>
-              <a:rPr lang="en-US" altLang="zh-TW" smtClean="0"/>
+              <a:rPr lang="en-US" altLang="zh-TW"/>
               <a:t>Fifth level</a:t>
             </a:r>
             <a:endParaRPr lang="zh-TW" altLang="en-US"/>
@@ -1669,7 +1669,7 @@
           <a:p>
             <a:pPr lvl="0"/>
             <a:r>
-              <a:rPr lang="en-US" altLang="zh-TW" smtClean="0"/>
+              <a:rPr lang="en-US" altLang="zh-TW"/>
               <a:t>Edit Master text styles</a:t>
             </a:r>
           </a:p>
@@ -1725,35 +1725,35 @@
           <a:p>
             <a:pPr lvl="0"/>
             <a:r>
-              <a:rPr lang="en-US" altLang="zh-TW" smtClean="0"/>
+              <a:rPr lang="en-US" altLang="zh-TW"/>
               <a:t>Edit Master text styles</a:t>
             </a:r>
           </a:p>
           <a:p>
             <a:pPr lvl="1"/>
             <a:r>
-              <a:rPr lang="en-US" altLang="zh-TW" smtClean="0"/>
+              <a:rPr lang="en-US" altLang="zh-TW"/>
               <a:t>Second level</a:t>
             </a:r>
           </a:p>
           <a:p>
             <a:pPr lvl="2"/>
             <a:r>
-              <a:rPr lang="en-US" altLang="zh-TW" smtClean="0"/>
+              <a:rPr lang="en-US" altLang="zh-TW"/>
               <a:t>Third level</a:t>
             </a:r>
           </a:p>
           <a:p>
             <a:pPr lvl="3"/>
             <a:r>
-              <a:rPr lang="en-US" altLang="zh-TW" smtClean="0"/>
+              <a:rPr lang="en-US" altLang="zh-TW"/>
               <a:t>Fourth level</a:t>
             </a:r>
           </a:p>
           <a:p>
             <a:pPr lvl="4"/>
             <a:r>
-              <a:rPr lang="en-US" altLang="zh-TW" smtClean="0"/>
+              <a:rPr lang="en-US" altLang="zh-TW"/>
               <a:t>Fifth level</a:t>
             </a:r>
             <a:endParaRPr lang="zh-TW" altLang="en-US"/>
@@ -1777,7 +1777,7 @@
           <a:p>
             <a:fld id="{A6A23CE9-6925-450D-83BB-532BB1B49E73}" type="datetimeFigureOut">
               <a:rPr lang="vi-VN" smtClean="0"/>
-              <a:t>16/09/2023</a:t>
+              <a:t>13/09/2025</a:t>
             </a:fld>
             <a:endParaRPr lang="vi-VN"/>
           </a:p>
@@ -1871,7 +1871,7 @@
           <a:lstStyle/>
           <a:p>
             <a:r>
-              <a:rPr lang="en-US" altLang="zh-TW" smtClean="0"/>
+              <a:rPr lang="en-US" altLang="zh-TW"/>
               <a:t>Click to edit Master title style</a:t>
             </a:r>
             <a:endParaRPr lang="zh-TW" altLang="en-US"/>
@@ -1895,7 +1895,7 @@
           <a:p>
             <a:fld id="{A6A23CE9-6925-450D-83BB-532BB1B49E73}" type="datetimeFigureOut">
               <a:rPr lang="vi-VN" smtClean="0"/>
-              <a:t>16/09/2023</a:t>
+              <a:t>13/09/2025</a:t>
             </a:fld>
             <a:endParaRPr lang="vi-VN"/>
           </a:p>
@@ -1990,7 +1990,7 @@
           <a:p>
             <a:fld id="{A6A23CE9-6925-450D-83BB-532BB1B49E73}" type="datetimeFigureOut">
               <a:rPr lang="vi-VN" smtClean="0"/>
-              <a:t>16/09/2023</a:t>
+              <a:t>13/09/2025</a:t>
             </a:fld>
             <a:endParaRPr lang="vi-VN"/>
           </a:p>
@@ -2093,7 +2093,7 @@
           </a:lstStyle>
           <a:p>
             <a:r>
-              <a:rPr lang="en-US" altLang="zh-TW" smtClean="0"/>
+              <a:rPr lang="en-US" altLang="zh-TW"/>
               <a:t>Click to edit Master title style</a:t>
             </a:r>
             <a:endParaRPr lang="zh-TW" altLang="en-US"/>
@@ -2150,35 +2150,35 @@
           <a:p>
             <a:pPr lvl="0"/>
             <a:r>
-              <a:rPr lang="en-US" altLang="zh-TW" smtClean="0"/>
+              <a:rPr lang="en-US" altLang="zh-TW"/>
               <a:t>Edit Master text styles</a:t>
             </a:r>
           </a:p>
           <a:p>
             <a:pPr lvl="1"/>
             <a:r>
-              <a:rPr lang="en-US" altLang="zh-TW" smtClean="0"/>
+              <a:rPr lang="en-US" altLang="zh-TW"/>
               <a:t>Second level</a:t>
             </a:r>
           </a:p>
           <a:p>
             <a:pPr lvl="2"/>
             <a:r>
-              <a:rPr lang="en-US" altLang="zh-TW" smtClean="0"/>
+              <a:rPr lang="en-US" altLang="zh-TW"/>
               <a:t>Third level</a:t>
             </a:r>
           </a:p>
           <a:p>
             <a:pPr lvl="3"/>
             <a:r>
-              <a:rPr lang="en-US" altLang="zh-TW" smtClean="0"/>
+              <a:rPr lang="en-US" altLang="zh-TW"/>
               <a:t>Fourth level</a:t>
             </a:r>
           </a:p>
           <a:p>
             <a:pPr lvl="4"/>
             <a:r>
-              <a:rPr lang="en-US" altLang="zh-TW" smtClean="0"/>
+              <a:rPr lang="en-US" altLang="zh-TW"/>
               <a:t>Fifth level</a:t>
             </a:r>
             <a:endParaRPr lang="zh-TW" altLang="en-US"/>
@@ -2244,7 +2244,7 @@
           <a:p>
             <a:pPr lvl="0"/>
             <a:r>
-              <a:rPr lang="en-US" altLang="zh-TW" smtClean="0"/>
+              <a:rPr lang="en-US" altLang="zh-TW"/>
               <a:t>Edit Master text styles</a:t>
             </a:r>
           </a:p>
@@ -2267,7 +2267,7 @@
           <a:p>
             <a:fld id="{A6A23CE9-6925-450D-83BB-532BB1B49E73}" type="datetimeFigureOut">
               <a:rPr lang="vi-VN" smtClean="0"/>
-              <a:t>16/09/2023</a:t>
+              <a:t>13/09/2025</a:t>
             </a:fld>
             <a:endParaRPr lang="vi-VN"/>
           </a:p>
@@ -2370,7 +2370,7 @@
           </a:lstStyle>
           <a:p>
             <a:r>
-              <a:rPr lang="en-US" altLang="zh-TW" smtClean="0"/>
+              <a:rPr lang="en-US" altLang="zh-TW"/>
               <a:t>Click to edit Master title style</a:t>
             </a:r>
             <a:endParaRPr lang="zh-TW" altLang="en-US"/>
@@ -2435,7 +2435,7 @@
           </a:lstStyle>
           <a:p>
             <a:r>
-              <a:rPr lang="en-US" altLang="zh-TW" smtClean="0"/>
+              <a:rPr lang="en-US" altLang="zh-TW"/>
               <a:t>Click icon to add picture</a:t>
             </a:r>
             <a:endParaRPr lang="zh-TW" altLang="en-US"/>
@@ -2501,7 +2501,7 @@
           <a:p>
             <a:pPr lvl="0"/>
             <a:r>
-              <a:rPr lang="en-US" altLang="zh-TW" smtClean="0"/>
+              <a:rPr lang="en-US" altLang="zh-TW"/>
               <a:t>Edit Master text styles</a:t>
             </a:r>
           </a:p>
@@ -2524,7 +2524,7 @@
           <a:p>
             <a:fld id="{A6A23CE9-6925-450D-83BB-532BB1B49E73}" type="datetimeFigureOut">
               <a:rPr lang="vi-VN" smtClean="0"/>
-              <a:t>16/09/2023</a:t>
+              <a:t>13/09/2025</a:t>
             </a:fld>
             <a:endParaRPr lang="vi-VN"/>
           </a:p>
@@ -2638,10 +2638,9 @@
           <a:lstStyle/>
           <a:p>
             <a:r>
-              <a:rPr lang="zh-TW" altLang="en-US" smtClean="0"/>
+              <a:rPr lang="zh-TW" altLang="en-US"/>
               <a:t>按一下以編輯母片標題樣式</a:t>
             </a:r>
-            <a:endParaRPr lang="zh-TW" altLang="en-US"/>
           </a:p>
         </p:txBody>
       </p:sp>
@@ -2672,38 +2671,37 @@
           <a:p>
             <a:pPr lvl="0"/>
             <a:r>
-              <a:rPr lang="zh-TW" altLang="en-US" smtClean="0"/>
+              <a:rPr lang="zh-TW" altLang="en-US"/>
               <a:t>按一下以編輯母片文字樣式</a:t>
             </a:r>
           </a:p>
           <a:p>
             <a:pPr lvl="1"/>
             <a:r>
-              <a:rPr lang="zh-TW" altLang="en-US" smtClean="0"/>
+              <a:rPr lang="zh-TW" altLang="en-US"/>
               <a:t>第二層</a:t>
             </a:r>
           </a:p>
           <a:p>
             <a:pPr lvl="2"/>
             <a:r>
-              <a:rPr lang="zh-TW" altLang="en-US" smtClean="0"/>
+              <a:rPr lang="zh-TW" altLang="en-US"/>
               <a:t>第三層</a:t>
             </a:r>
           </a:p>
           <a:p>
             <a:pPr lvl="3"/>
             <a:r>
-              <a:rPr lang="zh-TW" altLang="en-US" smtClean="0"/>
+              <a:rPr lang="zh-TW" altLang="en-US"/>
               <a:t>第四層</a:t>
             </a:r>
           </a:p>
           <a:p>
             <a:pPr lvl="4"/>
             <a:r>
-              <a:rPr lang="zh-TW" altLang="en-US" smtClean="0"/>
+              <a:rPr lang="zh-TW" altLang="en-US"/>
               <a:t>第五層</a:t>
             </a:r>
-            <a:endParaRPr lang="zh-TW" altLang="en-US"/>
           </a:p>
         </p:txBody>
       </p:sp>
@@ -2742,7 +2740,7 @@
           <a:p>
             <a:fld id="{A6A23CE9-6925-450D-83BB-532BB1B49E73}" type="datetimeFigureOut">
               <a:rPr lang="vi-VN" smtClean="0"/>
-              <a:t>16/09/2023</a:t>
+              <a:t>13/09/2025</a:t>
             </a:fld>
             <a:endParaRPr lang="vi-VN"/>
           </a:p>
@@ -3322,6 +3320,16 @@
               <a:t>正</a:t>
             </a:r>
             <a:r>
+              <a:rPr lang="zh-CN" altLang="en-US" sz="4400" b="1" dirty="0">
+                <a:solidFill>
+                  <a:srgbClr val="000066"/>
+                </a:solidFill>
+                <a:latin typeface="Microsoft JhengHei" panose="020B0604030504040204" pitchFamily="34" charset="-120"/>
+                <a:ea typeface="Microsoft JhengHei" panose="020B0604030504040204" pitchFamily="34" charset="-120"/>
+              </a:rPr>
+              <a:t>歌</a:t>
+            </a:r>
+            <a:r>
               <a:rPr lang="en-US" sz="4400" b="1" dirty="0">
                 <a:solidFill>
                   <a:srgbClr val="000066"/>
@@ -3467,7 +3475,6 @@
                 <a:solidFill>
                   <a:srgbClr val="000066"/>
                 </a:solidFill>
-                <a:effectLst/>
                 <a:latin typeface="Microsoft JhengHei" panose="020B0604030504040204" pitchFamily="34" charset="-120"/>
                 <a:ea typeface="Microsoft JhengHei" panose="020B0604030504040204" pitchFamily="34" charset="-120"/>
               </a:rPr>
@@ -3478,18 +3485,16 @@
                 <a:solidFill>
                   <a:srgbClr val="000066"/>
                 </a:solidFill>
-                <a:effectLst/>
                 <a:latin typeface="Microsoft JhengHei" panose="020B0604030504040204" pitchFamily="34" charset="-120"/>
                 <a:ea typeface="Microsoft JhengHei" panose="020B0604030504040204" pitchFamily="34" charset="-120"/>
               </a:rPr>
-              <a:t>正</a:t>
+              <a:t>正歌</a:t>
             </a:r>
             <a:r>
               <a:rPr lang="en-US" sz="4400" b="1" dirty="0">
                 <a:solidFill>
                   <a:srgbClr val="000066"/>
                 </a:solidFill>
-                <a:effectLst/>
                 <a:latin typeface="Microsoft JhengHei" panose="020B0604030504040204" pitchFamily="34" charset="-120"/>
                 <a:ea typeface="Microsoft JhengHei" panose="020B0604030504040204" pitchFamily="34" charset="-120"/>
               </a:rPr>
@@ -3499,7 +3504,6 @@
               <a:solidFill>
                 <a:srgbClr val="000066"/>
               </a:solidFill>
-              <a:effectLst/>
               <a:ea typeface="Microsoft JhengHei" panose="020B0604030504040204" pitchFamily="34" charset="-120"/>
             </a:endParaRPr>
           </a:p>
@@ -3630,7 +3634,6 @@
                 <a:solidFill>
                   <a:srgbClr val="000066"/>
                 </a:solidFill>
-                <a:effectLst/>
                 <a:latin typeface="Microsoft JhengHei" panose="020B0604030504040204" pitchFamily="34" charset="-120"/>
                 <a:ea typeface="Microsoft JhengHei" panose="020B0604030504040204" pitchFamily="34" charset="-120"/>
               </a:rPr>
@@ -3641,18 +3644,16 @@
                 <a:solidFill>
                   <a:srgbClr val="000066"/>
                 </a:solidFill>
-                <a:effectLst/>
                 <a:latin typeface="Microsoft JhengHei" panose="020B0604030504040204" pitchFamily="34" charset="-120"/>
                 <a:ea typeface="Microsoft JhengHei" panose="020B0604030504040204" pitchFamily="34" charset="-120"/>
               </a:rPr>
-              <a:t>正</a:t>
+              <a:t>正歌</a:t>
             </a:r>
             <a:r>
               <a:rPr lang="en-US" sz="4400" b="1" dirty="0">
                 <a:solidFill>
                   <a:srgbClr val="000066"/>
                 </a:solidFill>
-                <a:effectLst/>
                 <a:latin typeface="Microsoft JhengHei" panose="020B0604030504040204" pitchFamily="34" charset="-120"/>
                 <a:ea typeface="Microsoft JhengHei" panose="020B0604030504040204" pitchFamily="34" charset="-120"/>
               </a:rPr>
@@ -3662,7 +3663,6 @@
               <a:solidFill>
                 <a:srgbClr val="000066"/>
               </a:solidFill>
-              <a:effectLst/>
               <a:ea typeface="Microsoft JhengHei" panose="020B0604030504040204" pitchFamily="34" charset="-120"/>
             </a:endParaRPr>
           </a:p>
@@ -3793,7 +3793,6 @@
                 <a:solidFill>
                   <a:srgbClr val="000066"/>
                 </a:solidFill>
-                <a:effectLst/>
                 <a:latin typeface="Microsoft JhengHei" panose="020B0604030504040204" pitchFamily="34" charset="-120"/>
                 <a:ea typeface="Microsoft JhengHei" panose="020B0604030504040204" pitchFamily="34" charset="-120"/>
               </a:rPr>
@@ -3804,18 +3803,16 @@
                 <a:solidFill>
                   <a:srgbClr val="000066"/>
                 </a:solidFill>
-                <a:effectLst/>
                 <a:latin typeface="Microsoft JhengHei" panose="020B0604030504040204" pitchFamily="34" charset="-120"/>
                 <a:ea typeface="Microsoft JhengHei" panose="020B0604030504040204" pitchFamily="34" charset="-120"/>
               </a:rPr>
-              <a:t>正</a:t>
+              <a:t>正歌</a:t>
             </a:r>
             <a:r>
               <a:rPr lang="en-US" sz="4400" b="1" dirty="0">
                 <a:solidFill>
                   <a:srgbClr val="000066"/>
                 </a:solidFill>
-                <a:effectLst/>
                 <a:latin typeface="Microsoft JhengHei" panose="020B0604030504040204" pitchFamily="34" charset="-120"/>
                 <a:ea typeface="Microsoft JhengHei" panose="020B0604030504040204" pitchFamily="34" charset="-120"/>
               </a:rPr>
@@ -3825,7 +3822,6 @@
               <a:solidFill>
                 <a:srgbClr val="000066"/>
               </a:solidFill>
-              <a:effectLst/>
               <a:ea typeface="Microsoft JhengHei" panose="020B0604030504040204" pitchFamily="34" charset="-120"/>
             </a:endParaRPr>
           </a:p>
@@ -3974,6 +3970,16 @@
               <a:t>副</a:t>
             </a:r>
             <a:r>
+              <a:rPr lang="zh-CN" altLang="en-US" sz="4400" b="1" dirty="0">
+                <a:solidFill>
+                  <a:srgbClr val="000066"/>
+                </a:solidFill>
+                <a:latin typeface="Microsoft JhengHei" panose="020B0604030504040204" pitchFamily="34" charset="-120"/>
+                <a:ea typeface="Microsoft JhengHei" panose="020B0604030504040204" pitchFamily="34" charset="-120"/>
+              </a:rPr>
+              <a:t>歌</a:t>
+            </a:r>
+            <a:r>
               <a:rPr lang="en-US" sz="4400" b="1" dirty="0">
                 <a:solidFill>
                   <a:srgbClr val="000066"/>
@@ -4057,17 +4063,7 @@
                 <a:latin typeface="微軟正黑體" pitchFamily="34" charset="-120"/>
                 <a:ea typeface="微軟正黑體" pitchFamily="34" charset="-120"/>
               </a:rPr>
-              <a:t>是赤身露體   危險刀劍</a:t>
-            </a:r>
-            <a:r>
-              <a:rPr lang="zh-TW" altLang="en-US" sz="6400" b="1" dirty="0" smtClean="0">
-                <a:solidFill>
-                  <a:srgbClr val="000066"/>
-                </a:solidFill>
-                <a:latin typeface="微軟正黑體" pitchFamily="34" charset="-120"/>
-                <a:ea typeface="微軟正黑體" pitchFamily="34" charset="-120"/>
-              </a:rPr>
-              <a:t>嗎</a:t>
+              <a:t>是赤身露體   危險刀劍嗎</a:t>
             </a:r>
             <a:endParaRPr lang="en-US" altLang="zh-TW" sz="6400" b="1" dirty="0">
               <a:solidFill>
@@ -4107,7 +4103,6 @@
                 <a:solidFill>
                   <a:srgbClr val="000066"/>
                 </a:solidFill>
-                <a:effectLst/>
                 <a:latin typeface="Microsoft JhengHei" panose="020B0604030504040204" pitchFamily="34" charset="-120"/>
                 <a:ea typeface="Microsoft JhengHei" panose="020B0604030504040204" pitchFamily="34" charset="-120"/>
               </a:rPr>
@@ -4118,18 +4113,16 @@
                 <a:solidFill>
                   <a:srgbClr val="000066"/>
                 </a:solidFill>
-                <a:effectLst/>
                 <a:latin typeface="Microsoft JhengHei" panose="020B0604030504040204" pitchFamily="34" charset="-120"/>
                 <a:ea typeface="Microsoft JhengHei" panose="020B0604030504040204" pitchFamily="34" charset="-120"/>
               </a:rPr>
-              <a:t>副</a:t>
+              <a:t>副歌</a:t>
             </a:r>
             <a:r>
               <a:rPr lang="en-US" sz="4400" b="1" dirty="0">
                 <a:solidFill>
                   <a:srgbClr val="000066"/>
                 </a:solidFill>
-                <a:effectLst/>
                 <a:latin typeface="Microsoft JhengHei" panose="020B0604030504040204" pitchFamily="34" charset="-120"/>
                 <a:ea typeface="Microsoft JhengHei" panose="020B0604030504040204" pitchFamily="34" charset="-120"/>
               </a:rPr>
@@ -4139,7 +4132,6 @@
               <a:solidFill>
                 <a:srgbClr val="000066"/>
               </a:solidFill>
-              <a:effectLst/>
               <a:ea typeface="Microsoft JhengHei" panose="020B0604030504040204" pitchFamily="34" charset="-120"/>
             </a:endParaRPr>
           </a:p>
@@ -4201,36 +4193,16 @@
               <a:buNone/>
             </a:pPr>
             <a:r>
-              <a:rPr lang="zh-TW" altLang="en-US" sz="6400" b="1" dirty="0" smtClean="0">
+              <a:rPr lang="zh-TW" altLang="en-US" sz="6400" b="1" dirty="0">
                 <a:solidFill>
                   <a:srgbClr val="000066"/>
                 </a:solidFill>
                 <a:latin typeface="微軟正黑體" pitchFamily="34" charset="-120"/>
                 <a:ea typeface="微軟正黑體" pitchFamily="34" charset="-120"/>
               </a:rPr>
-              <a:t>不</a:t>
-            </a:r>
-            <a:r>
-              <a:rPr lang="zh-TW" altLang="en-US" sz="6400" b="1" dirty="0">
-                <a:solidFill>
-                  <a:srgbClr val="000066"/>
-                </a:solidFill>
-                <a:latin typeface="微軟正黑體" pitchFamily="34" charset="-120"/>
-                <a:ea typeface="微軟正黑體" pitchFamily="34" charset="-120"/>
-              </a:rPr>
-              <a:t>論是高處的   是低處</a:t>
-            </a:r>
-            <a:r>
-              <a:rPr lang="zh-TW" altLang="en-US" sz="6400" b="1" dirty="0" smtClean="0">
-                <a:solidFill>
-                  <a:srgbClr val="000066"/>
-                </a:solidFill>
-                <a:latin typeface="微軟正黑體" pitchFamily="34" charset="-120"/>
-                <a:ea typeface="微軟正黑體" pitchFamily="34" charset="-120"/>
-              </a:rPr>
-              <a:t>的</a:t>
-            </a:r>
-            <a:endParaRPr lang="en-US" altLang="zh-TW" sz="6400" b="1" dirty="0" smtClean="0">
+              <a:t>不論是高處的   是低處的</a:t>
+            </a:r>
+            <a:endParaRPr lang="en-US" altLang="zh-TW" sz="6400" b="1" dirty="0">
               <a:solidFill>
                 <a:srgbClr val="000066"/>
               </a:solidFill>
@@ -4290,7 +4262,6 @@
                 <a:solidFill>
                   <a:srgbClr val="000066"/>
                 </a:solidFill>
-                <a:effectLst/>
                 <a:latin typeface="Microsoft JhengHei" panose="020B0604030504040204" pitchFamily="34" charset="-120"/>
                 <a:ea typeface="Microsoft JhengHei" panose="020B0604030504040204" pitchFamily="34" charset="-120"/>
               </a:rPr>
@@ -4301,18 +4272,16 @@
                 <a:solidFill>
                   <a:srgbClr val="000066"/>
                 </a:solidFill>
-                <a:effectLst/>
                 <a:latin typeface="Microsoft JhengHei" panose="020B0604030504040204" pitchFamily="34" charset="-120"/>
                 <a:ea typeface="Microsoft JhengHei" panose="020B0604030504040204" pitchFamily="34" charset="-120"/>
               </a:rPr>
-              <a:t>副</a:t>
+              <a:t>副歌</a:t>
             </a:r>
             <a:r>
               <a:rPr lang="en-US" sz="4400" b="1" dirty="0">
                 <a:solidFill>
                   <a:srgbClr val="000066"/>
                 </a:solidFill>
-                <a:effectLst/>
                 <a:latin typeface="Microsoft JhengHei" panose="020B0604030504040204" pitchFamily="34" charset="-120"/>
                 <a:ea typeface="Microsoft JhengHei" panose="020B0604030504040204" pitchFamily="34" charset="-120"/>
               </a:rPr>
@@ -4322,7 +4291,6 @@
               <a:solidFill>
                 <a:srgbClr val="000066"/>
               </a:solidFill>
-              <a:effectLst/>
               <a:ea typeface="Microsoft JhengHei" panose="020B0604030504040204" pitchFamily="34" charset="-120"/>
             </a:endParaRPr>
           </a:p>
@@ -4384,24 +4352,14 @@
               <a:buNone/>
             </a:pPr>
             <a:r>
-              <a:rPr lang="zh-TW" altLang="en-US" sz="6400" b="1" dirty="0" smtClean="0">
+              <a:rPr lang="zh-TW" altLang="en-US" sz="6400" b="1" dirty="0">
                 <a:solidFill>
                   <a:srgbClr val="000066"/>
                 </a:solidFill>
                 <a:latin typeface="微軟正黑體" pitchFamily="34" charset="-120"/>
                 <a:ea typeface="微軟正黑體" pitchFamily="34" charset="-120"/>
               </a:rPr>
-              <a:t>都</a:t>
-            </a:r>
-            <a:r>
-              <a:rPr lang="zh-TW" altLang="en-US" sz="6400" b="1" dirty="0">
-                <a:solidFill>
-                  <a:srgbClr val="000066"/>
-                </a:solidFill>
-                <a:latin typeface="微軟正黑體" pitchFamily="34" charset="-120"/>
-                <a:ea typeface="微軟正黑體" pitchFamily="34" charset="-120"/>
-              </a:rPr>
-              <a:t>不能叫我與神的愛隔絕</a:t>
+              <a:t>都不能叫我與神的愛隔絕</a:t>
             </a:r>
             <a:endParaRPr lang="en-US" altLang="zh-TW" sz="6400" b="1" dirty="0">
               <a:solidFill>
@@ -4441,7 +4399,6 @@
                 <a:solidFill>
                   <a:srgbClr val="000066"/>
                 </a:solidFill>
-                <a:effectLst/>
                 <a:latin typeface="Microsoft JhengHei" panose="020B0604030504040204" pitchFamily="34" charset="-120"/>
                 <a:ea typeface="Microsoft JhengHei" panose="020B0604030504040204" pitchFamily="34" charset="-120"/>
               </a:rPr>
@@ -4452,18 +4409,16 @@
                 <a:solidFill>
                   <a:srgbClr val="000066"/>
                 </a:solidFill>
-                <a:effectLst/>
                 <a:latin typeface="Microsoft JhengHei" panose="020B0604030504040204" pitchFamily="34" charset="-120"/>
                 <a:ea typeface="Microsoft JhengHei" panose="020B0604030504040204" pitchFamily="34" charset="-120"/>
               </a:rPr>
-              <a:t>副</a:t>
+              <a:t>副歌</a:t>
             </a:r>
             <a:r>
               <a:rPr lang="en-US" sz="4400" b="1" dirty="0">
                 <a:solidFill>
                   <a:srgbClr val="000066"/>
                 </a:solidFill>
-                <a:effectLst/>
                 <a:latin typeface="Microsoft JhengHei" panose="020B0604030504040204" pitchFamily="34" charset="-120"/>
                 <a:ea typeface="Microsoft JhengHei" panose="020B0604030504040204" pitchFamily="34" charset="-120"/>
               </a:rPr>
@@ -4473,7 +4428,6 @@
               <a:solidFill>
                 <a:srgbClr val="000066"/>
               </a:solidFill>
-              <a:effectLst/>
               <a:ea typeface="Microsoft JhengHei" panose="020B0604030504040204" pitchFamily="34" charset="-120"/>
             </a:endParaRPr>
           </a:p>
